--- a/public/fun/cards/teacher/teacher-19.pptx
+++ b/public/fun/cards/teacher/teacher-19.pptx
@@ -3085,7 +3085,7 @@
     <p:bg>
       <p:bgPr>
         <a:solidFill>
-          <a:srgbClr val="191938"/>
+          <a:srgbClr val="D90429"/>
         </a:solidFill>
         <a:effectLst/>
       </p:bgPr>
@@ -3099,20 +3099,20 @@
       <p:grpSpPr/>
       <p:sp>
         <p:nvSpPr>
-          <p:cNvPr id="2" name="Rectangle 1"/>
+          <p:cNvPr id="2" name="Oval 1"/>
           <p:cNvSpPr/>
           <p:nvPr/>
         </p:nvSpPr>
         <p:spPr>
           <a:xfrm>
-            <a:off x="2196000" y="0"/>
-            <a:ext cx="1044000" cy="1800000"/>
+            <a:off x="547200" y="475200"/>
+            <a:ext cx="849600" cy="849600"/>
           </a:xfrm>
-          <a:prstGeom prst="rect">
+          <a:prstGeom prst="ellipse">
             <a:avLst/>
           </a:prstGeom>
           <a:solidFill>
-            <a:srgbClr val="656589"/>
+            <a:srgbClr val="E13654"/>
           </a:solidFill>
           <a:ln>
             <a:noFill/>
@@ -3134,10 +3134,161 @@
         </p:nvSpPr>
         <p:spPr>
           <a:xfrm>
-            <a:off x="2607120" y="609120"/>
-            <a:ext cx="221760" cy="221760"/>
+            <a:off x="187200" y="475200"/>
+            <a:ext cx="849600" cy="849600"/>
           </a:xfrm>
           <a:prstGeom prst="ellipse">
+            <a:avLst/>
+          </a:prstGeom>
+          <a:solidFill>
+            <a:srgbClr val="FFFFFF">
+              <a:alpha val="92000"/>
+            </a:srgbClr>
+          </a:solidFill>
+          <a:ln>
+            <a:noFill/>
+          </a:ln>
+        </p:spPr>
+        <p:txBody>
+          <a:bodyPr rtlCol="0" anchor="ctr"/>
+          <a:lstStyle/>
+          <a:p>
+            <a:pPr algn="ctr"/>
+          </a:p>
+        </p:txBody>
+      </p:sp>
+      <p:sp>
+        <p:nvSpPr>
+          <p:cNvPr id="4" name="텍스트"/>
+          <p:cNvSpPr txBox="1"/>
+          <p:nvPr/>
+        </p:nvSpPr>
+        <p:spPr>
+          <a:xfrm>
+            <a:off x="1692000" y="223200"/>
+            <a:ext cx="1296000" cy="133351"/>
+          </a:xfrm>
+          <a:prstGeom prst="rect">
+            <a:avLst/>
+          </a:prstGeom>
+          <a:noFill/>
+        </p:spPr>
+        <p:txBody>
+          <a:bodyPr wrap="square" lIns="0" rIns="0" tIns="0" bIns="0" anchor="t">
+            <a:spAutoFit/>
+          </a:bodyPr>
+          <a:lstStyle/>
+          <a:p>
+            <a:pPr algn="l">
+              <a:lnSpc>
+                <a:spcPts val="1015"/>
+              </a:lnSpc>
+            </a:pPr>
+            <a:r>
+              <a:rPr sz="700" b="1" spc="200">
+                <a:solidFill>
+                  <a:srgbClr val="F7C8D0"/>
+                </a:solidFill>
+                <a:latin typeface="맑은 고딕"/>
+                <a:ea typeface="맑은 고딕"/>
+              </a:rPr>
+              <a:t>학교 · 학원 이름</a:t>
+            </a:r>
+          </a:p>
+        </p:txBody>
+      </p:sp>
+      <p:sp>
+        <p:nvSpPr>
+          <p:cNvPr id="5" name="텍스트"/>
+          <p:cNvSpPr txBox="1"/>
+          <p:nvPr/>
+        </p:nvSpPr>
+        <p:spPr>
+          <a:xfrm>
+            <a:off x="1692000" y="540000"/>
+            <a:ext cx="1368000" cy="360000"/>
+          </a:xfrm>
+          <a:prstGeom prst="rect">
+            <a:avLst/>
+          </a:prstGeom>
+          <a:noFill/>
+        </p:spPr>
+        <p:txBody>
+          <a:bodyPr wrap="square" lIns="0" rIns="0" tIns="0" bIns="0" anchor="t">
+            <a:spAutoFit/>
+          </a:bodyPr>
+          <a:lstStyle/>
+          <a:p>
+            <a:pPr algn="l">
+              <a:lnSpc>
+                <a:spcPts val="3190"/>
+              </a:lnSpc>
+            </a:pPr>
+            <a:r>
+              <a:rPr sz="2200" b="1">
+                <a:solidFill>
+                  <a:srgbClr val="FFFFFF"/>
+                </a:solidFill>
+                <a:latin typeface="맑은 고딕"/>
+                <a:ea typeface="맑은 고딕"/>
+              </a:rPr>
+              <a:t>전보라</a:t>
+            </a:r>
+          </a:p>
+        </p:txBody>
+      </p:sp>
+      <p:sp>
+        <p:nvSpPr>
+          <p:cNvPr id="6" name="텍스트"/>
+          <p:cNvSpPr txBox="1"/>
+          <p:nvPr/>
+        </p:nvSpPr>
+        <p:spPr>
+          <a:xfrm>
+            <a:off x="1692000" y="943200"/>
+            <a:ext cx="1368000" cy="171451"/>
+          </a:xfrm>
+          <a:prstGeom prst="rect">
+            <a:avLst/>
+          </a:prstGeom>
+          <a:noFill/>
+        </p:spPr>
+        <p:txBody>
+          <a:bodyPr wrap="square" lIns="0" rIns="0" tIns="0" bIns="0" anchor="t">
+            <a:spAutoFit/>
+          </a:bodyPr>
+          <a:lstStyle/>
+          <a:p>
+            <a:pPr algn="l">
+              <a:lnSpc>
+                <a:spcPts val="1305"/>
+              </a:lnSpc>
+            </a:pPr>
+            <a:r>
+              <a:rPr sz="900" b="0">
+                <a:solidFill>
+                  <a:srgbClr val="F7C8D0"/>
+                </a:solidFill>
+                <a:latin typeface="맑은 고딕"/>
+                <a:ea typeface="맑은 고딕"/>
+              </a:rPr>
+              <a:t>코딩 강사</a:t>
+            </a:r>
+          </a:p>
+        </p:txBody>
+      </p:sp>
+      <p:sp>
+        <p:nvSpPr>
+          <p:cNvPr id="7" name="Rectangle 6"/>
+          <p:cNvSpPr/>
+          <p:nvPr/>
+        </p:nvSpPr>
+        <p:spPr>
+          <a:xfrm>
+            <a:off x="1692000" y="1195200"/>
+            <a:ext cx="144000" cy="18000"/>
+          </a:xfrm>
+          <a:prstGeom prst="rect">
             <a:avLst/>
           </a:prstGeom>
           <a:solidFill>
@@ -3155,184 +3306,16 @@
           </a:p>
         </p:txBody>
       </p:sp>
-      <p:cxnSp>
-        <p:nvCxnSpPr>
-          <p:cNvPr id="4" name="Connector 3"/>
-          <p:cNvCxnSpPr/>
+      <p:sp>
+        <p:nvSpPr>
+          <p:cNvPr id="8" name="텍스트"/>
+          <p:cNvSpPr txBox="1"/>
           <p:nvPr/>
-        </p:nvCxnSpPr>
+        </p:nvSpPr>
         <p:spPr>
           <a:xfrm>
-            <a:off x="2879280" y="720000"/>
-            <a:ext cx="70560" cy="0"/>
-          </a:xfrm>
-          <a:prstGeom prst="line">
-            <a:avLst/>
-          </a:prstGeom>
-          <a:ln w="30240">
-            <a:solidFill>
-              <a:srgbClr val="FFFFFF"/>
-            </a:solidFill>
-          </a:ln>
-        </p:spPr>
-      </p:cxnSp>
-      <p:cxnSp>
-        <p:nvCxnSpPr>
-          <p:cNvPr id="5" name="Connector 4"/>
-          <p:cNvCxnSpPr/>
-          <p:nvPr/>
-        </p:nvCxnSpPr>
-        <p:spPr>
-          <a:xfrm>
-            <a:off x="2832042" y="834042"/>
-            <a:ext cx="49894" cy="49894"/>
-          </a:xfrm>
-          <a:prstGeom prst="line">
-            <a:avLst/>
-          </a:prstGeom>
-          <a:ln w="30240">
-            <a:solidFill>
-              <a:srgbClr val="FFFFFF"/>
-            </a:solidFill>
-          </a:ln>
-        </p:spPr>
-      </p:cxnSp>
-      <p:cxnSp>
-        <p:nvCxnSpPr>
-          <p:cNvPr id="6" name="Connector 5"/>
-          <p:cNvCxnSpPr/>
-          <p:nvPr/>
-        </p:nvCxnSpPr>
-        <p:spPr>
-          <a:xfrm>
-            <a:off x="2718000" y="881280"/>
-            <a:ext cx="0" cy="70560"/>
-          </a:xfrm>
-          <a:prstGeom prst="line">
-            <a:avLst/>
-          </a:prstGeom>
-          <a:ln w="30240">
-            <a:solidFill>
-              <a:srgbClr val="FFFFFF"/>
-            </a:solidFill>
-          </a:ln>
-        </p:spPr>
-      </p:cxnSp>
-      <p:cxnSp>
-        <p:nvCxnSpPr>
-          <p:cNvPr id="7" name="Connector 6"/>
-          <p:cNvCxnSpPr/>
-          <p:nvPr/>
-        </p:nvCxnSpPr>
-        <p:spPr>
-          <a:xfrm flipH="1">
-            <a:off x="2554064" y="834042"/>
-            <a:ext cx="49894" cy="49894"/>
-          </a:xfrm>
-          <a:prstGeom prst="line">
-            <a:avLst/>
-          </a:prstGeom>
-          <a:ln w="30240">
-            <a:solidFill>
-              <a:srgbClr val="FFFFFF"/>
-            </a:solidFill>
-          </a:ln>
-        </p:spPr>
-      </p:cxnSp>
-      <p:cxnSp>
-        <p:nvCxnSpPr>
-          <p:cNvPr id="8" name="Connector 7"/>
-          <p:cNvCxnSpPr/>
-          <p:nvPr/>
-        </p:nvCxnSpPr>
-        <p:spPr>
-          <a:xfrm flipH="1">
-            <a:off x="2486160" y="720000"/>
-            <a:ext cx="70560" cy="0"/>
-          </a:xfrm>
-          <a:prstGeom prst="line">
-            <a:avLst/>
-          </a:prstGeom>
-          <a:ln w="30240">
-            <a:solidFill>
-              <a:srgbClr val="FFFFFF"/>
-            </a:solidFill>
-          </a:ln>
-        </p:spPr>
-      </p:cxnSp>
-      <p:cxnSp>
-        <p:nvCxnSpPr>
-          <p:cNvPr id="9" name="Connector 8"/>
-          <p:cNvCxnSpPr/>
-          <p:nvPr/>
-        </p:nvCxnSpPr>
-        <p:spPr>
-          <a:xfrm flipH="1" flipV="1">
-            <a:off x="2554064" y="556064"/>
-            <a:ext cx="49894" cy="49894"/>
-          </a:xfrm>
-          <a:prstGeom prst="line">
-            <a:avLst/>
-          </a:prstGeom>
-          <a:ln w="30240">
-            <a:solidFill>
-              <a:srgbClr val="FFFFFF"/>
-            </a:solidFill>
-          </a:ln>
-        </p:spPr>
-      </p:cxnSp>
-      <p:cxnSp>
-        <p:nvCxnSpPr>
-          <p:cNvPr id="10" name="Connector 9"/>
-          <p:cNvCxnSpPr/>
-          <p:nvPr/>
-        </p:nvCxnSpPr>
-        <p:spPr>
-          <a:xfrm flipV="1">
-            <a:off x="2718000" y="488160"/>
-            <a:ext cx="0" cy="70560"/>
-          </a:xfrm>
-          <a:prstGeom prst="line">
-            <a:avLst/>
-          </a:prstGeom>
-          <a:ln w="30240">
-            <a:solidFill>
-              <a:srgbClr val="FFFFFF"/>
-            </a:solidFill>
-          </a:ln>
-        </p:spPr>
-      </p:cxnSp>
-      <p:cxnSp>
-        <p:nvCxnSpPr>
-          <p:cNvPr id="11" name="Connector 10"/>
-          <p:cNvCxnSpPr/>
-          <p:nvPr/>
-        </p:nvCxnSpPr>
-        <p:spPr>
-          <a:xfrm flipV="1">
-            <a:off x="2832042" y="556064"/>
-            <a:ext cx="49894" cy="49894"/>
-          </a:xfrm>
-          <a:prstGeom prst="line">
-            <a:avLst/>
-          </a:prstGeom>
-          <a:ln w="30240">
-            <a:solidFill>
-              <a:srgbClr val="FFFFFF"/>
-            </a:solidFill>
-          </a:ln>
-        </p:spPr>
-      </p:cxnSp>
-      <p:sp>
-        <p:nvSpPr>
-          <p:cNvPr id="12" name="텍스트"/>
-          <p:cNvSpPr txBox="1"/>
-          <p:nvPr/>
-        </p:nvSpPr>
-        <p:spPr>
-          <a:xfrm>
-            <a:off x="2268000" y="1224000"/>
-            <a:ext cx="900000" cy="216000"/>
+            <a:off x="1692000" y="1328400"/>
+            <a:ext cx="331200" cy="99061"/>
           </a:xfrm>
           <a:prstGeom prst="rect">
             <a:avLst/>
@@ -3345,34 +3328,34 @@
           </a:bodyPr>
           <a:lstStyle/>
           <a:p>
-            <a:pPr algn="ctr">
+            <a:pPr algn="l">
               <a:lnSpc>
-                <a:spcPts val="1160"/>
+                <a:spcPts val="754"/>
               </a:lnSpc>
             </a:pPr>
             <a:r>
-              <a:rPr sz="800" b="1" spc="150">
+              <a:rPr sz="520" b="1" spc="120">
                 <a:solidFill>
-                  <a:srgbClr val="FFFFFF"/>
+                  <a:srgbClr val="F7C8D0"/>
                 </a:solidFill>
                 <a:latin typeface="맑은 고딕"/>
                 <a:ea typeface="맑은 고딕"/>
               </a:rPr>
-              <a:t>학교 · 학원 이름</a:t>
-            </a:r>
-          </a:p>
-        </p:txBody>
-      </p:sp>
-      <p:sp>
-        <p:nvSpPr>
-          <p:cNvPr id="13" name="텍스트"/>
+              <a:t>TEL</a:t>
+            </a:r>
+          </a:p>
+        </p:txBody>
+      </p:sp>
+      <p:sp>
+        <p:nvSpPr>
+          <p:cNvPr id="9" name="텍스트"/>
           <p:cNvSpPr txBox="1"/>
           <p:nvPr/>
         </p:nvSpPr>
         <p:spPr>
           <a:xfrm>
-            <a:off x="216000" y="331200"/>
-            <a:ext cx="1872000" cy="313692"/>
+            <a:off x="2023200" y="1317600"/>
+            <a:ext cx="1188000" cy="125731"/>
           </a:xfrm>
           <a:prstGeom prst="rect">
             <a:avLst/>
@@ -3387,160 +3370,11 @@
           <a:p>
             <a:pPr algn="l">
               <a:lnSpc>
-                <a:spcPts val="2755"/>
+                <a:spcPts val="956"/>
               </a:lnSpc>
             </a:pPr>
             <a:r>
-              <a:rPr sz="1900" b="1" spc="50">
-                <a:solidFill>
-                  <a:srgbClr val="FFFFFF"/>
-                </a:solidFill>
-                <a:latin typeface="맑은 고딕"/>
-                <a:ea typeface="맑은 고딕"/>
-              </a:rPr>
-              <a:t>전보라</a:t>
-            </a:r>
-          </a:p>
-        </p:txBody>
-      </p:sp>
-      <p:sp>
-        <p:nvSpPr>
-          <p:cNvPr id="14" name="텍스트"/>
-          <p:cNvSpPr txBox="1"/>
-          <p:nvPr/>
-        </p:nvSpPr>
-        <p:spPr>
-          <a:xfrm>
-            <a:off x="216000" y="619200"/>
-            <a:ext cx="1872000" cy="122400"/>
-          </a:xfrm>
-          <a:prstGeom prst="rect">
-            <a:avLst/>
-          </a:prstGeom>
-          <a:noFill/>
-        </p:spPr>
-        <p:txBody>
-          <a:bodyPr wrap="square" lIns="0" rIns="0" tIns="0" bIns="0" anchor="t">
-            <a:spAutoFit/>
-          </a:bodyPr>
-          <a:lstStyle/>
-          <a:p>
-            <a:pPr algn="l">
-              <a:lnSpc>
-                <a:spcPts val="1232"/>
-              </a:lnSpc>
-            </a:pPr>
-            <a:r>
-              <a:rPr sz="850" b="1">
-                <a:solidFill>
-                  <a:srgbClr val="8484A1"/>
-                </a:solidFill>
-                <a:latin typeface="맑은 고딕"/>
-                <a:ea typeface="맑은 고딕"/>
-              </a:rPr>
-              <a:t>코딩 강사</a:t>
-            </a:r>
-          </a:p>
-        </p:txBody>
-      </p:sp>
-      <p:sp>
-        <p:nvSpPr>
-          <p:cNvPr id="15" name="Rectangle 14"/>
-          <p:cNvSpPr/>
-          <p:nvPr/>
-        </p:nvSpPr>
-        <p:spPr>
-          <a:xfrm>
-            <a:off x="216000" y="828000"/>
-            <a:ext cx="201600" cy="14400"/>
-          </a:xfrm>
-          <a:prstGeom prst="rect">
-            <a:avLst/>
-          </a:prstGeom>
-          <a:solidFill>
-            <a:srgbClr val="656589"/>
-          </a:solidFill>
-          <a:ln>
-            <a:noFill/>
-          </a:ln>
-        </p:spPr>
-        <p:txBody>
-          <a:bodyPr rtlCol="0" anchor="ctr"/>
-          <a:lstStyle/>
-          <a:p>
-            <a:pPr algn="ctr"/>
-          </a:p>
-        </p:txBody>
-      </p:sp>
-      <p:sp>
-        <p:nvSpPr>
-          <p:cNvPr id="16" name="텍스트"/>
-          <p:cNvSpPr txBox="1"/>
-          <p:nvPr/>
-        </p:nvSpPr>
-        <p:spPr>
-          <a:xfrm>
-            <a:off x="216000" y="1008000"/>
-            <a:ext cx="122400" cy="168911"/>
-          </a:xfrm>
-          <a:prstGeom prst="rect">
-            <a:avLst/>
-          </a:prstGeom>
-          <a:noFill/>
-        </p:spPr>
-        <p:txBody>
-          <a:bodyPr wrap="square" lIns="0" rIns="0" tIns="0" bIns="0" anchor="t">
-            <a:spAutoFit/>
-          </a:bodyPr>
-          <a:lstStyle/>
-          <a:p>
-            <a:pPr algn="l">
-              <a:lnSpc>
-                <a:spcPts val="1015"/>
-              </a:lnSpc>
-            </a:pPr>
-            <a:r>
-              <a:rPr sz="700" b="1">
-                <a:solidFill>
-                  <a:srgbClr val="8484A1"/>
-                </a:solidFill>
-                <a:latin typeface="맑은 고딕"/>
-                <a:ea typeface="맑은 고딕"/>
-              </a:rPr>
-              <a:t>T</a:t>
-            </a:r>
-          </a:p>
-        </p:txBody>
-      </p:sp>
-      <p:sp>
-        <p:nvSpPr>
-          <p:cNvPr id="17" name="텍스트"/>
-          <p:cNvSpPr txBox="1"/>
-          <p:nvPr/>
-        </p:nvSpPr>
-        <p:spPr>
-          <a:xfrm>
-            <a:off x="360000" y="1008000"/>
-            <a:ext cx="1584000" cy="168911"/>
-          </a:xfrm>
-          <a:prstGeom prst="rect">
-            <a:avLst/>
-          </a:prstGeom>
-          <a:noFill/>
-        </p:spPr>
-        <p:txBody>
-          <a:bodyPr wrap="square" lIns="0" rIns="0" tIns="0" bIns="0" anchor="t">
-            <a:spAutoFit/>
-          </a:bodyPr>
-          <a:lstStyle/>
-          <a:p>
-            <a:pPr algn="l">
-              <a:lnSpc>
-                <a:spcPts val="1015"/>
-              </a:lnSpc>
-            </a:pPr>
-            <a:r>
-              <a:rPr sz="700" b="0">
+              <a:rPr sz="660" b="0">
                 <a:solidFill>
                   <a:srgbClr val="FFFFFF"/>
                 </a:solidFill>
@@ -3554,14 +3388,14 @@
       </p:sp>
       <p:sp>
         <p:nvSpPr>
-          <p:cNvPr id="18" name="텍스트"/>
+          <p:cNvPr id="10" name="텍스트"/>
           <p:cNvSpPr txBox="1"/>
           <p:nvPr/>
         </p:nvSpPr>
         <p:spPr>
           <a:xfrm>
-            <a:off x="216000" y="1176911"/>
-            <a:ext cx="122400" cy="168911"/>
+            <a:off x="1692000" y="1458000"/>
+            <a:ext cx="331200" cy="99061"/>
           </a:xfrm>
           <a:prstGeom prst="rect">
             <a:avLst/>
@@ -3576,32 +3410,32 @@
           <a:p>
             <a:pPr algn="l">
               <a:lnSpc>
-                <a:spcPts val="1015"/>
+                <a:spcPts val="754"/>
               </a:lnSpc>
             </a:pPr>
             <a:r>
-              <a:rPr sz="700" b="1">
+              <a:rPr sz="520" b="1" spc="120">
                 <a:solidFill>
-                  <a:srgbClr val="8484A1"/>
+                  <a:srgbClr val="F7C8D0"/>
                 </a:solidFill>
                 <a:latin typeface="맑은 고딕"/>
                 <a:ea typeface="맑은 고딕"/>
               </a:rPr>
-              <a:t>E</a:t>
-            </a:r>
-          </a:p>
-        </p:txBody>
-      </p:sp>
-      <p:sp>
-        <p:nvSpPr>
-          <p:cNvPr id="19" name="텍스트"/>
+              <a:t>MAIL</a:t>
+            </a:r>
+          </a:p>
+        </p:txBody>
+      </p:sp>
+      <p:sp>
+        <p:nvSpPr>
+          <p:cNvPr id="11" name="텍스트"/>
           <p:cNvSpPr txBox="1"/>
           <p:nvPr/>
         </p:nvSpPr>
         <p:spPr>
           <a:xfrm>
-            <a:off x="360000" y="1176911"/>
-            <a:ext cx="1584000" cy="168911"/>
+            <a:off x="2023200" y="1447200"/>
+            <a:ext cx="1188000" cy="125731"/>
           </a:xfrm>
           <a:prstGeom prst="rect">
             <a:avLst/>
@@ -3616,11 +3450,11 @@
           <a:p>
             <a:pPr algn="l">
               <a:lnSpc>
-                <a:spcPts val="1015"/>
+                <a:spcPts val="956"/>
               </a:lnSpc>
             </a:pPr>
             <a:r>
-              <a:rPr sz="700" b="0">
+              <a:rPr sz="660" b="0">
                 <a:solidFill>
                   <a:srgbClr val="FFFFFF"/>
                 </a:solidFill>
@@ -3634,14 +3468,14 @@
       </p:sp>
       <p:sp>
         <p:nvSpPr>
-          <p:cNvPr id="20" name="텍스트"/>
+          <p:cNvPr id="12" name="텍스트"/>
           <p:cNvSpPr txBox="1"/>
           <p:nvPr/>
         </p:nvSpPr>
         <p:spPr>
           <a:xfrm>
-            <a:off x="216000" y="1345822"/>
-            <a:ext cx="122400" cy="168911"/>
+            <a:off x="1692000" y="1587600"/>
+            <a:ext cx="331200" cy="99061"/>
           </a:xfrm>
           <a:prstGeom prst="rect">
             <a:avLst/>
@@ -3656,32 +3490,32 @@
           <a:p>
             <a:pPr algn="l">
               <a:lnSpc>
-                <a:spcPts val="1015"/>
+                <a:spcPts val="754"/>
               </a:lnSpc>
             </a:pPr>
             <a:r>
-              <a:rPr sz="700" b="1">
+              <a:rPr sz="520" b="1" spc="120">
                 <a:solidFill>
-                  <a:srgbClr val="8484A1"/>
+                  <a:srgbClr val="F7C8D0"/>
                 </a:solidFill>
                 <a:latin typeface="맑은 고딕"/>
                 <a:ea typeface="맑은 고딕"/>
               </a:rPr>
-              <a:t>A</a:t>
-            </a:r>
-          </a:p>
-        </p:txBody>
-      </p:sp>
-      <p:sp>
-        <p:nvSpPr>
-          <p:cNvPr id="21" name="텍스트"/>
+              <a:t>ADDR</a:t>
+            </a:r>
+          </a:p>
+        </p:txBody>
+      </p:sp>
+      <p:sp>
+        <p:nvSpPr>
+          <p:cNvPr id="13" name="텍스트"/>
           <p:cNvSpPr txBox="1"/>
           <p:nvPr/>
         </p:nvSpPr>
         <p:spPr>
           <a:xfrm>
-            <a:off x="360000" y="1345822"/>
-            <a:ext cx="1584000" cy="168911"/>
+            <a:off x="2023200" y="1576800"/>
+            <a:ext cx="1188000" cy="125731"/>
           </a:xfrm>
           <a:prstGeom prst="rect">
             <a:avLst/>
@@ -3696,11 +3530,11 @@
           <a:p>
             <a:pPr algn="l">
               <a:lnSpc>
-                <a:spcPts val="1015"/>
+                <a:spcPts val="956"/>
               </a:lnSpc>
             </a:pPr>
             <a:r>
-              <a:rPr sz="700" b="0">
+              <a:rPr sz="660" b="0">
                 <a:solidFill>
                   <a:srgbClr val="FFFFFF"/>
                 </a:solidFill>
@@ -3726,7 +3560,7 @@
     <p:bg>
       <p:bgPr>
         <a:solidFill>
-          <a:srgbClr val="191938"/>
+          <a:srgbClr val="0E1116"/>
         </a:solidFill>
         <a:effectLst/>
       </p:bgPr>
@@ -3740,43 +3574,14 @@
       <p:grpSpPr/>
       <p:sp>
         <p:nvSpPr>
-          <p:cNvPr id="2" name="Rectangle 1"/>
-          <p:cNvSpPr/>
+          <p:cNvPr id="2" name="텍스트"/>
+          <p:cNvSpPr txBox="1"/>
           <p:nvPr/>
         </p:nvSpPr>
         <p:spPr>
           <a:xfrm>
-            <a:off x="0" y="0"/>
-            <a:ext cx="64800" cy="1800000"/>
-          </a:xfrm>
-          <a:prstGeom prst="rect">
-            <a:avLst/>
-          </a:prstGeom>
-          <a:solidFill>
-            <a:srgbClr val="656589"/>
-          </a:solidFill>
-          <a:ln>
-            <a:noFill/>
-          </a:ln>
-        </p:spPr>
-        <p:txBody>
-          <a:bodyPr rtlCol="0" anchor="ctr"/>
-          <a:lstStyle/>
-          <a:p>
-            <a:pPr algn="ctr"/>
-          </a:p>
-        </p:txBody>
-      </p:sp>
-      <p:sp>
-        <p:nvSpPr>
-          <p:cNvPr id="3" name="텍스트"/>
-          <p:cNvSpPr txBox="1"/>
-          <p:nvPr/>
-        </p:nvSpPr>
-        <p:spPr>
-          <a:xfrm>
-            <a:off x="252000" y="432000"/>
-            <a:ext cx="2016000" cy="252000"/>
+            <a:off x="216000" y="72000"/>
+            <a:ext cx="1080000" cy="936000"/>
           </a:xfrm>
           <a:prstGeom prst="rect">
             <a:avLst/>
@@ -3791,32 +3596,93 @@
           <a:p>
             <a:pPr algn="l">
               <a:lnSpc>
-                <a:spcPts val="2465"/>
+                <a:spcPts val="15950"/>
               </a:lnSpc>
             </a:pPr>
             <a:r>
-              <a:rPr sz="1700" b="1">
+              <a:rPr sz="11000" b="1">
+                <a:solidFill>
+                  <a:srgbClr val="E23D5A"/>
+                </a:solidFill>
+                <a:latin typeface="맑은 고딕"/>
+                <a:ea typeface="맑은 고딕"/>
+              </a:rPr>
+              <a:t>“</a:t>
+            </a:r>
+          </a:p>
+        </p:txBody>
+      </p:sp>
+      <p:sp>
+        <p:nvSpPr>
+          <p:cNvPr id="3" name="텍스트"/>
+          <p:cNvSpPr txBox="1"/>
+          <p:nvPr/>
+        </p:nvSpPr>
+        <p:spPr>
+          <a:xfrm>
+            <a:off x="252000" y="792000"/>
+            <a:ext cx="2520000" cy="648000"/>
+          </a:xfrm>
+          <a:prstGeom prst="rect">
+            <a:avLst/>
+          </a:prstGeom>
+          <a:noFill/>
+        </p:spPr>
+        <p:txBody>
+          <a:bodyPr wrap="square" lIns="0" rIns="0" tIns="0" bIns="0" anchor="t">
+            <a:spAutoFit/>
+          </a:bodyPr>
+          <a:lstStyle/>
+          <a:p>
+            <a:pPr algn="l">
+              <a:lnSpc>
+                <a:spcPts val="1812"/>
+              </a:lnSpc>
+            </a:pPr>
+            <a:r>
+              <a:rPr sz="1250" b="1">
                 <a:solidFill>
                   <a:srgbClr val="FFFFFF"/>
                 </a:solidFill>
                 <a:latin typeface="맑은 고딕"/>
                 <a:ea typeface="맑은 고딕"/>
               </a:rPr>
-              <a:t>학교 · 학원 이름</a:t>
-            </a:r>
-          </a:p>
-        </p:txBody>
-      </p:sp>
-      <p:sp>
-        <p:nvSpPr>
-          <p:cNvPr id="4" name="텍스트"/>
+              <a:t>하루하루가 소중한 수업</a:t>
+            </a:r>
+          </a:p>
+        </p:txBody>
+      </p:sp>
+      <p:cxnSp>
+        <p:nvCxnSpPr>
+          <p:cNvPr id="4" name="Connector 3"/>
+          <p:cNvCxnSpPr/>
+          <p:nvPr/>
+        </p:nvCxnSpPr>
+        <p:spPr>
+          <a:xfrm>
+            <a:off x="252000" y="1512000"/>
+            <a:ext cx="2736000" cy="0"/>
+          </a:xfrm>
+          <a:prstGeom prst="line">
+            <a:avLst/>
+          </a:prstGeom>
+          <a:ln w="5760">
+            <a:solidFill>
+              <a:srgbClr val="2A2F38"/>
+            </a:solidFill>
+          </a:ln>
+        </p:spPr>
+      </p:cxnSp>
+      <p:sp>
+        <p:nvSpPr>
+          <p:cNvPr id="5" name="텍스트"/>
           <p:cNvSpPr txBox="1"/>
           <p:nvPr/>
         </p:nvSpPr>
         <p:spPr>
           <a:xfrm>
-            <a:off x="252000" y="878400"/>
-            <a:ext cx="2016000" cy="540000"/>
+            <a:off x="252000" y="1569600"/>
+            <a:ext cx="2736000" cy="123826"/>
           </a:xfrm>
           <a:prstGeom prst="rect">
             <a:avLst/>
@@ -3829,320 +3695,24 @@
           </a:bodyPr>
           <a:lstStyle/>
           <a:p>
-            <a:pPr algn="l">
+            <a:pPr algn="r">
               <a:lnSpc>
-                <a:spcPts val="1232"/>
+                <a:spcPts val="942"/>
               </a:lnSpc>
             </a:pPr>
             <a:r>
-              <a:rPr sz="850" b="0">
+              <a:rPr sz="650" b="1" spc="200">
                 <a:solidFill>
-                  <a:srgbClr val="AEAEB9"/>
+                  <a:srgbClr val="A3A9B5"/>
                 </a:solidFill>
                 <a:latin typeface="맑은 고딕"/>
                 <a:ea typeface="맑은 고딕"/>
               </a:rPr>
-              <a:t>하루하루가 소중한 수업</a:t>
-            </a:r>
-          </a:p>
-        </p:txBody>
-      </p:sp>
-      <p:sp>
-        <p:nvSpPr>
-          <p:cNvPr id="5" name="Rectangle 4"/>
-          <p:cNvSpPr/>
-          <p:nvPr/>
-        </p:nvSpPr>
-        <p:spPr>
-          <a:xfrm>
-            <a:off x="2520000" y="1080000"/>
-            <a:ext cx="504000" cy="504000"/>
-          </a:xfrm>
-          <a:prstGeom prst="rect">
-            <a:avLst/>
-          </a:prstGeom>
-          <a:noFill/>
-          <a:ln w="9000">
-            <a:solidFill>
-              <a:srgbClr val="656589"/>
-            </a:solidFill>
-            <a:prstDash val="dash"/>
-          </a:ln>
-        </p:spPr>
-        <p:txBody>
-          <a:bodyPr rtlCol="0" anchor="ctr"/>
-          <a:lstStyle/>
-          <a:p>
-            <a:pPr algn="ctr"/>
-          </a:p>
-        </p:txBody>
-      </p:sp>
-      <p:sp>
-        <p:nvSpPr>
-          <p:cNvPr id="6" name="텍스트"/>
-          <p:cNvSpPr txBox="1"/>
-          <p:nvPr/>
-        </p:nvSpPr>
-        <p:spPr>
-          <a:xfrm>
-            <a:off x="2520000" y="1080000"/>
-            <a:ext cx="504000" cy="504000"/>
-          </a:xfrm>
-          <a:prstGeom prst="rect">
-            <a:avLst/>
-          </a:prstGeom>
-          <a:noFill/>
-        </p:spPr>
-        <p:txBody>
-          <a:bodyPr wrap="square" lIns="0" rIns="0" tIns="0" bIns="0" anchor="ctr">
-            <a:spAutoFit/>
-          </a:bodyPr>
-          <a:lstStyle/>
-          <a:p>
-            <a:pPr algn="ctr">
-              <a:lnSpc>
-                <a:spcPts val="1305"/>
-              </a:lnSpc>
-            </a:pPr>
-            <a:r>
-              <a:rPr sz="900" b="1">
-                <a:solidFill>
-                  <a:srgbClr val="AEAEB9"/>
-                </a:solidFill>
-                <a:latin typeface="맑은 고딕"/>
-                <a:ea typeface="맑은 고딕"/>
-              </a:rPr>
-              <a:t>QR</a:t>
-            </a:r>
-          </a:p>
-        </p:txBody>
-      </p:sp>
-      <p:sp>
-        <p:nvSpPr>
-          <p:cNvPr id="7" name="Rectangle 6"/>
-          <p:cNvSpPr/>
-          <p:nvPr/>
-        </p:nvSpPr>
-        <p:spPr>
-          <a:xfrm>
-            <a:off x="252000" y="763200"/>
-            <a:ext cx="201600" cy="14400"/>
-          </a:xfrm>
-          <a:prstGeom prst="rect">
-            <a:avLst/>
-          </a:prstGeom>
-          <a:solidFill>
-            <a:srgbClr val="656589"/>
-          </a:solidFill>
-          <a:ln>
-            <a:noFill/>
-          </a:ln>
-        </p:spPr>
-        <p:txBody>
-          <a:bodyPr rtlCol="0" anchor="ctr"/>
-          <a:lstStyle/>
-          <a:p>
-            <a:pPr algn="ctr"/>
-          </a:p>
-        </p:txBody>
-      </p:sp>
-      <p:sp>
-        <p:nvSpPr>
-          <p:cNvPr id="8" name="Oval 7"/>
-          <p:cNvSpPr/>
-          <p:nvPr/>
-        </p:nvSpPr>
-        <p:spPr>
-          <a:xfrm>
-            <a:off x="2700720" y="360720"/>
-            <a:ext cx="142560" cy="142560"/>
-          </a:xfrm>
-          <a:prstGeom prst="ellipse">
-            <a:avLst/>
-          </a:prstGeom>
-          <a:solidFill>
-            <a:srgbClr val="656589"/>
-          </a:solidFill>
-          <a:ln>
-            <a:noFill/>
-          </a:ln>
-        </p:spPr>
-        <p:txBody>
-          <a:bodyPr rtlCol="0" anchor="ctr"/>
-          <a:lstStyle/>
-          <a:p>
-            <a:pPr algn="ctr"/>
-          </a:p>
-        </p:txBody>
-      </p:sp>
-      <p:cxnSp>
-        <p:nvCxnSpPr>
-          <p:cNvPr id="9" name="Connector 8"/>
-          <p:cNvCxnSpPr/>
-          <p:nvPr/>
-        </p:nvCxnSpPr>
-        <p:spPr>
-          <a:xfrm>
-            <a:off x="2875680" y="432000"/>
-            <a:ext cx="45360" cy="0"/>
-          </a:xfrm>
-          <a:prstGeom prst="line">
-            <a:avLst/>
-          </a:prstGeom>
-          <a:ln w="19440">
-            <a:solidFill>
-              <a:srgbClr val="3E3E58"/>
-            </a:solidFill>
-          </a:ln>
-        </p:spPr>
-      </p:cxnSp>
-      <p:cxnSp>
-        <p:nvCxnSpPr>
-          <p:cNvPr id="10" name="Connector 9"/>
-          <p:cNvCxnSpPr/>
-          <p:nvPr/>
-        </p:nvCxnSpPr>
-        <p:spPr>
-          <a:xfrm>
-            <a:off x="2845313" y="505313"/>
-            <a:ext cx="32074" cy="32074"/>
-          </a:xfrm>
-          <a:prstGeom prst="line">
-            <a:avLst/>
-          </a:prstGeom>
-          <a:ln w="19440">
-            <a:solidFill>
-              <a:srgbClr val="3E3E58"/>
-            </a:solidFill>
-          </a:ln>
-        </p:spPr>
-      </p:cxnSp>
-      <p:cxnSp>
-        <p:nvCxnSpPr>
-          <p:cNvPr id="11" name="Connector 10"/>
-          <p:cNvCxnSpPr/>
-          <p:nvPr/>
-        </p:nvCxnSpPr>
-        <p:spPr>
-          <a:xfrm>
-            <a:off x="2772000" y="535680"/>
-            <a:ext cx="0" cy="45360"/>
-          </a:xfrm>
-          <a:prstGeom prst="line">
-            <a:avLst/>
-          </a:prstGeom>
-          <a:ln w="19440">
-            <a:solidFill>
-              <a:srgbClr val="3E3E58"/>
-            </a:solidFill>
-          </a:ln>
-        </p:spPr>
-      </p:cxnSp>
-      <p:cxnSp>
-        <p:nvCxnSpPr>
-          <p:cNvPr id="12" name="Connector 11"/>
-          <p:cNvCxnSpPr/>
-          <p:nvPr/>
-        </p:nvCxnSpPr>
-        <p:spPr>
-          <a:xfrm flipH="1">
-            <a:off x="2666613" y="505313"/>
-            <a:ext cx="32074" cy="32074"/>
-          </a:xfrm>
-          <a:prstGeom prst="line">
-            <a:avLst/>
-          </a:prstGeom>
-          <a:ln w="19440">
-            <a:solidFill>
-              <a:srgbClr val="3E3E58"/>
-            </a:solidFill>
-          </a:ln>
-        </p:spPr>
-      </p:cxnSp>
-      <p:cxnSp>
-        <p:nvCxnSpPr>
-          <p:cNvPr id="13" name="Connector 12"/>
-          <p:cNvCxnSpPr/>
-          <p:nvPr/>
-        </p:nvCxnSpPr>
-        <p:spPr>
-          <a:xfrm flipH="1">
-            <a:off x="2622960" y="432000"/>
-            <a:ext cx="45360" cy="0"/>
-          </a:xfrm>
-          <a:prstGeom prst="line">
-            <a:avLst/>
-          </a:prstGeom>
-          <a:ln w="19440">
-            <a:solidFill>
-              <a:srgbClr val="3E3E58"/>
-            </a:solidFill>
-          </a:ln>
-        </p:spPr>
-      </p:cxnSp>
-      <p:cxnSp>
-        <p:nvCxnSpPr>
-          <p:cNvPr id="14" name="Connector 13"/>
-          <p:cNvCxnSpPr/>
-          <p:nvPr/>
-        </p:nvCxnSpPr>
-        <p:spPr>
-          <a:xfrm flipH="1" flipV="1">
-            <a:off x="2666613" y="326613"/>
-            <a:ext cx="32074" cy="32074"/>
-          </a:xfrm>
-          <a:prstGeom prst="line">
-            <a:avLst/>
-          </a:prstGeom>
-          <a:ln w="19440">
-            <a:solidFill>
-              <a:srgbClr val="3E3E58"/>
-            </a:solidFill>
-          </a:ln>
-        </p:spPr>
-      </p:cxnSp>
-      <p:cxnSp>
-        <p:nvCxnSpPr>
-          <p:cNvPr id="15" name="Connector 14"/>
-          <p:cNvCxnSpPr/>
-          <p:nvPr/>
-        </p:nvCxnSpPr>
-        <p:spPr>
-          <a:xfrm flipV="1">
-            <a:off x="2772000" y="282960"/>
-            <a:ext cx="0" cy="45360"/>
-          </a:xfrm>
-          <a:prstGeom prst="line">
-            <a:avLst/>
-          </a:prstGeom>
-          <a:ln w="19440">
-            <a:solidFill>
-              <a:srgbClr val="3E3E58"/>
-            </a:solidFill>
-          </a:ln>
-        </p:spPr>
-      </p:cxnSp>
-      <p:cxnSp>
-        <p:nvCxnSpPr>
-          <p:cNvPr id="16" name="Connector 15"/>
-          <p:cNvCxnSpPr/>
-          <p:nvPr/>
-        </p:nvCxnSpPr>
-        <p:spPr>
-          <a:xfrm flipV="1">
-            <a:off x="2845313" y="326613"/>
-            <a:ext cx="32074" cy="32074"/>
-          </a:xfrm>
-          <a:prstGeom prst="line">
-            <a:avLst/>
-          </a:prstGeom>
-          <a:ln w="19440">
-            <a:solidFill>
-              <a:srgbClr val="3E3E58"/>
-            </a:solidFill>
-          </a:ln>
-        </p:spPr>
-      </p:cxnSp>
+              <a:t>학교 · 학원 이름</a:t>
+            </a:r>
+          </a:p>
+        </p:txBody>
+      </p:sp>
     </p:spTree>
   </p:cSld>
   <p:clrMapOvr>

--- a/public/fun/cards/teacher/teacher-19.pptx
+++ b/public/fun/cards/teacher/teacher-19.pptx
@@ -3097,196 +3097,37 @@
         <p:nvPr/>
       </p:nvGrpSpPr>
       <p:grpSpPr/>
-      <p:sp>
-        <p:nvSpPr>
-          <p:cNvPr id="2" name="Oval 1"/>
+      <p:cxnSp>
+        <p:nvCxnSpPr>
+          <p:cNvPr id="2" name="Connector 1"/>
+          <p:cNvCxnSpPr/>
+          <p:nvPr/>
+        </p:nvCxnSpPr>
+        <p:spPr>
+          <a:xfrm>
+            <a:off x="1080000" y="252000"/>
+            <a:ext cx="0" cy="1296000"/>
+          </a:xfrm>
+          <a:prstGeom prst="line">
+            <a:avLst/>
+          </a:prstGeom>
+          <a:ln w="3600">
+            <a:solidFill>
+              <a:srgbClr val="E8687F"/>
+            </a:solidFill>
+          </a:ln>
+        </p:spPr>
+      </p:cxnSp>
+      <p:sp>
+        <p:nvSpPr>
+          <p:cNvPr id="3" name="Rectangle 2"/>
           <p:cNvSpPr/>
           <p:nvPr/>
         </p:nvSpPr>
         <p:spPr>
           <a:xfrm>
-            <a:off x="547200" y="475200"/>
-            <a:ext cx="849600" cy="849600"/>
-          </a:xfrm>
-          <a:prstGeom prst="ellipse">
-            <a:avLst/>
-          </a:prstGeom>
-          <a:solidFill>
-            <a:srgbClr val="E13654"/>
-          </a:solidFill>
-          <a:ln>
-            <a:noFill/>
-          </a:ln>
-        </p:spPr>
-        <p:txBody>
-          <a:bodyPr rtlCol="0" anchor="ctr"/>
-          <a:lstStyle/>
-          <a:p>
-            <a:pPr algn="ctr"/>
-          </a:p>
-        </p:txBody>
-      </p:sp>
-      <p:sp>
-        <p:nvSpPr>
-          <p:cNvPr id="3" name="Oval 2"/>
-          <p:cNvSpPr/>
-          <p:nvPr/>
-        </p:nvSpPr>
-        <p:spPr>
-          <a:xfrm>
-            <a:off x="187200" y="475200"/>
-            <a:ext cx="849600" cy="849600"/>
-          </a:xfrm>
-          <a:prstGeom prst="ellipse">
-            <a:avLst/>
-          </a:prstGeom>
-          <a:solidFill>
-            <a:srgbClr val="FFFFFF">
-              <a:alpha val="92000"/>
-            </a:srgbClr>
-          </a:solidFill>
-          <a:ln>
-            <a:noFill/>
-          </a:ln>
-        </p:spPr>
-        <p:txBody>
-          <a:bodyPr rtlCol="0" anchor="ctr"/>
-          <a:lstStyle/>
-          <a:p>
-            <a:pPr algn="ctr"/>
-          </a:p>
-        </p:txBody>
-      </p:sp>
-      <p:sp>
-        <p:nvSpPr>
-          <p:cNvPr id="4" name="텍스트"/>
-          <p:cNvSpPr txBox="1"/>
-          <p:nvPr/>
-        </p:nvSpPr>
-        <p:spPr>
-          <a:xfrm>
-            <a:off x="1692000" y="223200"/>
-            <a:ext cx="1296000" cy="133351"/>
-          </a:xfrm>
-          <a:prstGeom prst="rect">
-            <a:avLst/>
-          </a:prstGeom>
-          <a:noFill/>
-        </p:spPr>
-        <p:txBody>
-          <a:bodyPr wrap="square" lIns="0" rIns="0" tIns="0" bIns="0" anchor="t">
-            <a:spAutoFit/>
-          </a:bodyPr>
-          <a:lstStyle/>
-          <a:p>
-            <a:pPr algn="l">
-              <a:lnSpc>
-                <a:spcPts val="1015"/>
-              </a:lnSpc>
-            </a:pPr>
-            <a:r>
-              <a:rPr sz="700" b="1" spc="200">
-                <a:solidFill>
-                  <a:srgbClr val="F7C8D0"/>
-                </a:solidFill>
-                <a:latin typeface="맑은 고딕"/>
-                <a:ea typeface="맑은 고딕"/>
-              </a:rPr>
-              <a:t>학교 · 학원 이름</a:t>
-            </a:r>
-          </a:p>
-        </p:txBody>
-      </p:sp>
-      <p:sp>
-        <p:nvSpPr>
-          <p:cNvPr id="5" name="텍스트"/>
-          <p:cNvSpPr txBox="1"/>
-          <p:nvPr/>
-        </p:nvSpPr>
-        <p:spPr>
-          <a:xfrm>
-            <a:off x="1692000" y="540000"/>
-            <a:ext cx="1368000" cy="360000"/>
-          </a:xfrm>
-          <a:prstGeom prst="rect">
-            <a:avLst/>
-          </a:prstGeom>
-          <a:noFill/>
-        </p:spPr>
-        <p:txBody>
-          <a:bodyPr wrap="square" lIns="0" rIns="0" tIns="0" bIns="0" anchor="t">
-            <a:spAutoFit/>
-          </a:bodyPr>
-          <a:lstStyle/>
-          <a:p>
-            <a:pPr algn="l">
-              <a:lnSpc>
-                <a:spcPts val="3190"/>
-              </a:lnSpc>
-            </a:pPr>
-            <a:r>
-              <a:rPr sz="2200" b="1">
-                <a:solidFill>
-                  <a:srgbClr val="FFFFFF"/>
-                </a:solidFill>
-                <a:latin typeface="맑은 고딕"/>
-                <a:ea typeface="맑은 고딕"/>
-              </a:rPr>
-              <a:t>전보라</a:t>
-            </a:r>
-          </a:p>
-        </p:txBody>
-      </p:sp>
-      <p:sp>
-        <p:nvSpPr>
-          <p:cNvPr id="6" name="텍스트"/>
-          <p:cNvSpPr txBox="1"/>
-          <p:nvPr/>
-        </p:nvSpPr>
-        <p:spPr>
-          <a:xfrm>
-            <a:off x="1692000" y="943200"/>
-            <a:ext cx="1368000" cy="171451"/>
-          </a:xfrm>
-          <a:prstGeom prst="rect">
-            <a:avLst/>
-          </a:prstGeom>
-          <a:noFill/>
-        </p:spPr>
-        <p:txBody>
-          <a:bodyPr wrap="square" lIns="0" rIns="0" tIns="0" bIns="0" anchor="t">
-            <a:spAutoFit/>
-          </a:bodyPr>
-          <a:lstStyle/>
-          <a:p>
-            <a:pPr algn="l">
-              <a:lnSpc>
-                <a:spcPts val="1305"/>
-              </a:lnSpc>
-            </a:pPr>
-            <a:r>
-              <a:rPr sz="900" b="0">
-                <a:solidFill>
-                  <a:srgbClr val="F7C8D0"/>
-                </a:solidFill>
-                <a:latin typeface="맑은 고딕"/>
-                <a:ea typeface="맑은 고딕"/>
-              </a:rPr>
-              <a:t>코딩 강사</a:t>
-            </a:r>
-          </a:p>
-        </p:txBody>
-      </p:sp>
-      <p:sp>
-        <p:nvSpPr>
-          <p:cNvPr id="7" name="Rectangle 6"/>
-          <p:cNvSpPr/>
-          <p:nvPr/>
-        </p:nvSpPr>
-        <p:spPr>
-          <a:xfrm>
-            <a:off x="1692000" y="1195200"/>
-            <a:ext cx="144000" cy="18000"/>
+            <a:off x="1069200" y="252000"/>
+            <a:ext cx="21600" cy="201600"/>
           </a:xfrm>
           <a:prstGeom prst="rect">
             <a:avLst/>
@@ -3308,14 +3149,14 @@
       </p:sp>
       <p:sp>
         <p:nvSpPr>
-          <p:cNvPr id="8" name="텍스트"/>
+          <p:cNvPr id="4" name="텍스트"/>
           <p:cNvSpPr txBox="1"/>
           <p:nvPr/>
         </p:nvSpPr>
         <p:spPr>
           <a:xfrm>
-            <a:off x="1692000" y="1328400"/>
-            <a:ext cx="331200" cy="99061"/>
+            <a:off x="252000" y="252000"/>
+            <a:ext cx="756000" cy="123826"/>
           </a:xfrm>
           <a:prstGeom prst="rect">
             <a:avLst/>
@@ -3330,11 +3171,221 @@
           <a:p>
             <a:pPr algn="l">
               <a:lnSpc>
-                <a:spcPts val="754"/>
+                <a:spcPts val="942"/>
               </a:lnSpc>
             </a:pPr>
             <a:r>
-              <a:rPr sz="520" b="1" spc="120">
+              <a:rPr sz="650" b="1" spc="220">
+                <a:solidFill>
+                  <a:srgbClr val="F7C8D0"/>
+                </a:solidFill>
+                <a:latin typeface="맑은 고딕"/>
+                <a:ea typeface="맑은 고딕"/>
+              </a:rPr>
+              <a:t>학교 · 학원 이름</a:t>
+            </a:r>
+          </a:p>
+        </p:txBody>
+      </p:sp>
+      <p:sp>
+        <p:nvSpPr>
+          <p:cNvPr id="5" name="Oval 4"/>
+          <p:cNvSpPr/>
+          <p:nvPr/>
+        </p:nvSpPr>
+        <p:spPr>
+          <a:xfrm>
+            <a:off x="273600" y="734400"/>
+            <a:ext cx="244800" cy="244800"/>
+          </a:xfrm>
+          <a:prstGeom prst="ellipse">
+            <a:avLst/>
+          </a:prstGeom>
+          <a:noFill/>
+          <a:ln w="5040">
+            <a:solidFill>
+              <a:srgbClr val="FFFFFF"/>
+            </a:solidFill>
+          </a:ln>
+        </p:spPr>
+        <p:txBody>
+          <a:bodyPr rtlCol="0" anchor="ctr"/>
+          <a:lstStyle/>
+          <a:p>
+            <a:pPr algn="ctr"/>
+          </a:p>
+        </p:txBody>
+      </p:sp>
+      <p:sp>
+        <p:nvSpPr>
+          <p:cNvPr id="6" name="텍스트"/>
+          <p:cNvSpPr txBox="1"/>
+          <p:nvPr/>
+        </p:nvSpPr>
+        <p:spPr>
+          <a:xfrm>
+            <a:off x="252000" y="734400"/>
+            <a:ext cx="288000" cy="252000"/>
+          </a:xfrm>
+          <a:prstGeom prst="rect">
+            <a:avLst/>
+          </a:prstGeom>
+          <a:noFill/>
+        </p:spPr>
+        <p:txBody>
+          <a:bodyPr wrap="square" lIns="0" rIns="0" tIns="0" bIns="0" anchor="ctr">
+            <a:spAutoFit/>
+          </a:bodyPr>
+          <a:lstStyle/>
+          <a:p>
+            <a:pPr algn="ctr">
+              <a:lnSpc>
+                <a:spcPts val="1305"/>
+              </a:lnSpc>
+            </a:pPr>
+            <a:r>
+              <a:rPr sz="900" b="1">
+                <a:solidFill>
+                  <a:srgbClr val="FFFFFF"/>
+                </a:solidFill>
+                <a:latin typeface="맑은 고딕"/>
+                <a:ea typeface="맑은 고딕"/>
+              </a:rPr>
+              <a:t>학</a:t>
+            </a:r>
+          </a:p>
+        </p:txBody>
+      </p:sp>
+      <p:sp>
+        <p:nvSpPr>
+          <p:cNvPr id="7" name="텍스트"/>
+          <p:cNvSpPr txBox="1"/>
+          <p:nvPr/>
+        </p:nvSpPr>
+        <p:spPr>
+          <a:xfrm>
+            <a:off x="1260000" y="432000"/>
+            <a:ext cx="1800000" cy="237600"/>
+          </a:xfrm>
+          <a:prstGeom prst="rect">
+            <a:avLst/>
+          </a:prstGeom>
+          <a:noFill/>
+        </p:spPr>
+        <p:txBody>
+          <a:bodyPr wrap="square" lIns="0" rIns="0" tIns="0" bIns="0" anchor="t">
+            <a:spAutoFit/>
+          </a:bodyPr>
+          <a:lstStyle/>
+          <a:p>
+            <a:pPr algn="l">
+              <a:lnSpc>
+                <a:spcPts val="1957"/>
+              </a:lnSpc>
+            </a:pPr>
+            <a:r>
+              <a:rPr sz="1350" b="1" spc="120">
+                <a:solidFill>
+                  <a:srgbClr val="FFFFFF"/>
+                </a:solidFill>
+                <a:latin typeface="맑은 고딕"/>
+                <a:ea typeface="맑은 고딕"/>
+              </a:rPr>
+              <a:t>전보라</a:t>
+            </a:r>
+          </a:p>
+        </p:txBody>
+      </p:sp>
+      <p:sp>
+        <p:nvSpPr>
+          <p:cNvPr id="8" name="텍스트"/>
+          <p:cNvSpPr txBox="1"/>
+          <p:nvPr/>
+        </p:nvSpPr>
+        <p:spPr>
+          <a:xfrm>
+            <a:off x="1260000" y="684000"/>
+            <a:ext cx="1800000" cy="133351"/>
+          </a:xfrm>
+          <a:prstGeom prst="rect">
+            <a:avLst/>
+          </a:prstGeom>
+          <a:noFill/>
+        </p:spPr>
+        <p:txBody>
+          <a:bodyPr wrap="square" lIns="0" rIns="0" tIns="0" bIns="0" anchor="t">
+            <a:spAutoFit/>
+          </a:bodyPr>
+          <a:lstStyle/>
+          <a:p>
+            <a:pPr algn="l">
+              <a:lnSpc>
+                <a:spcPts val="1015"/>
+              </a:lnSpc>
+            </a:pPr>
+            <a:r>
+              <a:rPr sz="700" b="0" spc="60">
+                <a:solidFill>
+                  <a:srgbClr val="F7C8D0"/>
+                </a:solidFill>
+                <a:latin typeface="맑은 고딕"/>
+                <a:ea typeface="맑은 고딕"/>
+              </a:rPr>
+              <a:t>코딩 강사</a:t>
+            </a:r>
+          </a:p>
+        </p:txBody>
+      </p:sp>
+      <p:cxnSp>
+        <p:nvCxnSpPr>
+          <p:cNvPr id="9" name="Connector 8"/>
+          <p:cNvCxnSpPr/>
+          <p:nvPr/>
+        </p:nvCxnSpPr>
+        <p:spPr>
+          <a:xfrm>
+            <a:off x="1260000" y="943200"/>
+            <a:ext cx="1728000" cy="0"/>
+          </a:xfrm>
+          <a:prstGeom prst="line">
+            <a:avLst/>
+          </a:prstGeom>
+          <a:ln w="3600">
+            <a:solidFill>
+              <a:srgbClr val="E8687F"/>
+            </a:solidFill>
+          </a:ln>
+        </p:spPr>
+      </p:cxnSp>
+      <p:sp>
+        <p:nvSpPr>
+          <p:cNvPr id="10" name="텍스트"/>
+          <p:cNvSpPr txBox="1"/>
+          <p:nvPr/>
+        </p:nvSpPr>
+        <p:spPr>
+          <a:xfrm>
+            <a:off x="1260000" y="1054800"/>
+            <a:ext cx="331200" cy="91441"/>
+          </a:xfrm>
+          <a:prstGeom prst="rect">
+            <a:avLst/>
+          </a:prstGeom>
+          <a:noFill/>
+        </p:spPr>
+        <p:txBody>
+          <a:bodyPr wrap="square" lIns="0" rIns="0" tIns="0" bIns="0" anchor="t">
+            <a:spAutoFit/>
+          </a:bodyPr>
+          <a:lstStyle/>
+          <a:p>
+            <a:pPr algn="l">
+              <a:lnSpc>
+                <a:spcPts val="696"/>
+              </a:lnSpc>
+            </a:pPr>
+            <a:r>
+              <a:rPr sz="480" b="1" spc="140">
                 <a:solidFill>
                   <a:srgbClr val="F7C8D0"/>
                 </a:solidFill>
@@ -3348,14 +3399,14 @@
       </p:sp>
       <p:sp>
         <p:nvSpPr>
-          <p:cNvPr id="9" name="텍스트"/>
+          <p:cNvPr id="11" name="텍스트"/>
           <p:cNvSpPr txBox="1"/>
           <p:nvPr/>
         </p:nvSpPr>
         <p:spPr>
           <a:xfrm>
-            <a:off x="2023200" y="1317600"/>
-            <a:ext cx="1188000" cy="125731"/>
+            <a:off x="1591200" y="1044000"/>
+            <a:ext cx="1188000" cy="123826"/>
           </a:xfrm>
           <a:prstGeom prst="rect">
             <a:avLst/>
@@ -3370,11 +3421,11 @@
           <a:p>
             <a:pPr algn="l">
               <a:lnSpc>
-                <a:spcPts val="956"/>
+                <a:spcPts val="942"/>
               </a:lnSpc>
             </a:pPr>
             <a:r>
-              <a:rPr sz="660" b="0">
+              <a:rPr sz="650" b="0">
                 <a:solidFill>
                   <a:srgbClr val="FFFFFF"/>
                 </a:solidFill>
@@ -3388,14 +3439,14 @@
       </p:sp>
       <p:sp>
         <p:nvSpPr>
-          <p:cNvPr id="10" name="텍스트"/>
+          <p:cNvPr id="12" name="텍스트"/>
           <p:cNvSpPr txBox="1"/>
           <p:nvPr/>
         </p:nvSpPr>
         <p:spPr>
           <a:xfrm>
-            <a:off x="1692000" y="1458000"/>
-            <a:ext cx="331200" cy="99061"/>
+            <a:off x="1260000" y="1184400"/>
+            <a:ext cx="331200" cy="91441"/>
           </a:xfrm>
           <a:prstGeom prst="rect">
             <a:avLst/>
@@ -3410,11 +3461,11 @@
           <a:p>
             <a:pPr algn="l">
               <a:lnSpc>
-                <a:spcPts val="754"/>
+                <a:spcPts val="696"/>
               </a:lnSpc>
             </a:pPr>
             <a:r>
-              <a:rPr sz="520" b="1" spc="120">
+              <a:rPr sz="480" b="1" spc="140">
                 <a:solidFill>
                   <a:srgbClr val="F7C8D0"/>
                 </a:solidFill>
@@ -3428,14 +3479,14 @@
       </p:sp>
       <p:sp>
         <p:nvSpPr>
-          <p:cNvPr id="11" name="텍스트"/>
+          <p:cNvPr id="13" name="텍스트"/>
           <p:cNvSpPr txBox="1"/>
           <p:nvPr/>
         </p:nvSpPr>
         <p:spPr>
           <a:xfrm>
-            <a:off x="2023200" y="1447200"/>
-            <a:ext cx="1188000" cy="125731"/>
+            <a:off x="1591200" y="1173600"/>
+            <a:ext cx="1188000" cy="123826"/>
           </a:xfrm>
           <a:prstGeom prst="rect">
             <a:avLst/>
@@ -3450,11 +3501,11 @@
           <a:p>
             <a:pPr algn="l">
               <a:lnSpc>
-                <a:spcPts val="956"/>
+                <a:spcPts val="942"/>
               </a:lnSpc>
             </a:pPr>
             <a:r>
-              <a:rPr sz="660" b="0">
+              <a:rPr sz="650" b="0">
                 <a:solidFill>
                   <a:srgbClr val="FFFFFF"/>
                 </a:solidFill>
@@ -3468,14 +3519,14 @@
       </p:sp>
       <p:sp>
         <p:nvSpPr>
-          <p:cNvPr id="12" name="텍스트"/>
+          <p:cNvPr id="14" name="텍스트"/>
           <p:cNvSpPr txBox="1"/>
           <p:nvPr/>
         </p:nvSpPr>
         <p:spPr>
           <a:xfrm>
-            <a:off x="1692000" y="1587600"/>
-            <a:ext cx="331200" cy="99061"/>
+            <a:off x="1260000" y="1314000"/>
+            <a:ext cx="331200" cy="91441"/>
           </a:xfrm>
           <a:prstGeom prst="rect">
             <a:avLst/>
@@ -3490,11 +3541,11 @@
           <a:p>
             <a:pPr algn="l">
               <a:lnSpc>
-                <a:spcPts val="754"/>
+                <a:spcPts val="696"/>
               </a:lnSpc>
             </a:pPr>
             <a:r>
-              <a:rPr sz="520" b="1" spc="120">
+              <a:rPr sz="480" b="1" spc="140">
                 <a:solidFill>
                   <a:srgbClr val="F7C8D0"/>
                 </a:solidFill>
@@ -3508,14 +3559,14 @@
       </p:sp>
       <p:sp>
         <p:nvSpPr>
-          <p:cNvPr id="13" name="텍스트"/>
+          <p:cNvPr id="15" name="텍스트"/>
           <p:cNvSpPr txBox="1"/>
           <p:nvPr/>
         </p:nvSpPr>
         <p:spPr>
           <a:xfrm>
-            <a:off x="2023200" y="1576800"/>
-            <a:ext cx="1188000" cy="125731"/>
+            <a:off x="1591200" y="1303200"/>
+            <a:ext cx="1188000" cy="123826"/>
           </a:xfrm>
           <a:prstGeom prst="rect">
             <a:avLst/>
@@ -3530,11 +3581,11 @@
           <a:p>
             <a:pPr algn="l">
               <a:lnSpc>
-                <a:spcPts val="956"/>
+                <a:spcPts val="942"/>
               </a:lnSpc>
             </a:pPr>
             <a:r>
-              <a:rPr sz="660" b="0">
+              <a:rPr sz="650" b="0">
                 <a:solidFill>
                   <a:srgbClr val="FFFFFF"/>
                 </a:solidFill>
@@ -3574,54 +3625,74 @@
       <p:grpSpPr/>
       <p:sp>
         <p:nvSpPr>
-          <p:cNvPr id="2" name="텍스트"/>
-          <p:cNvSpPr txBox="1"/>
+          <p:cNvPr id="2" name="Rectangle 1"/>
+          <p:cNvSpPr/>
           <p:nvPr/>
         </p:nvSpPr>
         <p:spPr>
           <a:xfrm>
-            <a:off x="216000" y="72000"/>
-            <a:ext cx="1080000" cy="936000"/>
+            <a:off x="0" y="0"/>
+            <a:ext cx="3240000" cy="1800000"/>
+          </a:xfrm>
+          <a:prstGeom prst="rect">
+            <a:avLst/>
+          </a:prstGeom>
+          <a:solidFill>
+            <a:srgbClr val="E23D5A"/>
+          </a:solidFill>
+          <a:ln>
+            <a:noFill/>
+          </a:ln>
+        </p:spPr>
+        <p:txBody>
+          <a:bodyPr rtlCol="0" anchor="ctr"/>
+          <a:lstStyle/>
+          <a:p>
+            <a:pPr algn="ctr"/>
+          </a:p>
+        </p:txBody>
+      </p:sp>
+      <p:sp>
+        <p:nvSpPr>
+          <p:cNvPr id="3" name="Rectangle 2"/>
+          <p:cNvSpPr/>
+          <p:nvPr/>
+        </p:nvSpPr>
+        <p:spPr>
+          <a:xfrm>
+            <a:off x="108000" y="108000"/>
+            <a:ext cx="3024000" cy="1584000"/>
           </a:xfrm>
           <a:prstGeom prst="rect">
             <a:avLst/>
           </a:prstGeom>
           <a:noFill/>
-        </p:spPr>
-        <p:txBody>
-          <a:bodyPr wrap="square" lIns="0" rIns="0" tIns="0" bIns="0" anchor="t">
-            <a:spAutoFit/>
-          </a:bodyPr>
-          <a:lstStyle/>
-          <a:p>
-            <a:pPr algn="l">
-              <a:lnSpc>
-                <a:spcPts val="15950"/>
-              </a:lnSpc>
-            </a:pPr>
-            <a:r>
-              <a:rPr sz="11000" b="1">
-                <a:solidFill>
-                  <a:srgbClr val="E23D5A"/>
-                </a:solidFill>
-                <a:latin typeface="맑은 고딕"/>
-                <a:ea typeface="맑은 고딕"/>
-              </a:rPr>
-              <a:t>“</a:t>
-            </a:r>
-          </a:p>
-        </p:txBody>
-      </p:sp>
-      <p:sp>
-        <p:nvSpPr>
-          <p:cNvPr id="3" name="텍스트"/>
+          <a:ln w="3600">
+            <a:solidFill>
+              <a:srgbClr val="FFFFFF">
+                <a:alpha val="50000"/>
+              </a:srgbClr>
+            </a:solidFill>
+          </a:ln>
+        </p:spPr>
+        <p:txBody>
+          <a:bodyPr rtlCol="0" anchor="ctr"/>
+          <a:lstStyle/>
+          <a:p>
+            <a:pPr algn="ctr"/>
+          </a:p>
+        </p:txBody>
+      </p:sp>
+      <p:sp>
+        <p:nvSpPr>
+          <p:cNvPr id="4" name="텍스트"/>
           <p:cNvSpPr txBox="1"/>
           <p:nvPr/>
         </p:nvSpPr>
         <p:spPr>
           <a:xfrm>
-            <a:off x="252000" y="792000"/>
-            <a:ext cx="2520000" cy="648000"/>
+            <a:off x="288000" y="280800"/>
+            <a:ext cx="1440000" cy="99061"/>
           </a:xfrm>
           <a:prstGeom prst="rect">
             <a:avLst/>
@@ -3636,43 +3707,22 @@
           <a:p>
             <a:pPr algn="l">
               <a:lnSpc>
-                <a:spcPts val="1812"/>
+                <a:spcPts val="754"/>
               </a:lnSpc>
             </a:pPr>
             <a:r>
-              <a:rPr sz="1250" b="1">
+              <a:rPr sz="520" b="1" spc="240">
                 <a:solidFill>
                   <a:srgbClr val="FFFFFF"/>
                 </a:solidFill>
                 <a:latin typeface="맑은 고딕"/>
                 <a:ea typeface="맑은 고딕"/>
               </a:rPr>
-              <a:t>하루하루가 소중한 수업</a:t>
-            </a:r>
-          </a:p>
-        </p:txBody>
-      </p:sp>
-      <p:cxnSp>
-        <p:nvCxnSpPr>
-          <p:cNvPr id="4" name="Connector 3"/>
-          <p:cNvCxnSpPr/>
-          <p:nvPr/>
-        </p:nvCxnSpPr>
-        <p:spPr>
-          <a:xfrm>
-            <a:off x="252000" y="1512000"/>
-            <a:ext cx="2736000" cy="0"/>
-          </a:xfrm>
-          <a:prstGeom prst="line">
-            <a:avLst/>
-          </a:prstGeom>
-          <a:ln w="5760">
-            <a:solidFill>
-              <a:srgbClr val="2A2F38"/>
-            </a:solidFill>
-          </a:ln>
-        </p:spPr>
-      </p:cxnSp>
+              <a:t>수업 안내</a:t>
+            </a:r>
+          </a:p>
+        </p:txBody>
+      </p:sp>
       <p:sp>
         <p:nvSpPr>
           <p:cNvPr id="5" name="텍스트"/>
@@ -3681,8 +3731,8 @@
         </p:nvSpPr>
         <p:spPr>
           <a:xfrm>
-            <a:off x="252000" y="1569600"/>
-            <a:ext cx="2736000" cy="123826"/>
+            <a:off x="288000" y="468000"/>
+            <a:ext cx="1872000" cy="216000"/>
           </a:xfrm>
           <a:prstGeom prst="rect">
             <a:avLst/>
@@ -3695,15 +3745,423 @@
           </a:bodyPr>
           <a:lstStyle/>
           <a:p>
-            <a:pPr algn="r">
+            <a:pPr algn="l">
+              <a:lnSpc>
+                <a:spcPts val="1377"/>
+              </a:lnSpc>
+            </a:pPr>
+            <a:r>
+              <a:rPr sz="950" b="1">
+                <a:solidFill>
+                  <a:srgbClr val="FFFFFF"/>
+                </a:solidFill>
+                <a:latin typeface="맑은 고딕"/>
+                <a:ea typeface="맑은 고딕"/>
+              </a:rPr>
+              <a:t>국어</a:t>
+            </a:r>
+          </a:p>
+        </p:txBody>
+      </p:sp>
+      <p:cxnSp>
+        <p:nvCxnSpPr>
+          <p:cNvPr id="6" name="Connector 5"/>
+          <p:cNvCxnSpPr/>
+          <p:nvPr/>
+        </p:nvCxnSpPr>
+        <p:spPr>
+          <a:xfrm>
+            <a:off x="288000" y="669600"/>
+            <a:ext cx="1728000" cy="0"/>
+          </a:xfrm>
+          <a:prstGeom prst="line">
+            <a:avLst/>
+          </a:prstGeom>
+          <a:ln w="3600">
+            <a:solidFill>
+              <a:srgbClr val="FFFFFF"/>
+            </a:solidFill>
+          </a:ln>
+        </p:spPr>
+      </p:cxnSp>
+      <p:sp>
+        <p:nvSpPr>
+          <p:cNvPr id="7" name="텍스트"/>
+          <p:cNvSpPr txBox="1"/>
+          <p:nvPr/>
+        </p:nvSpPr>
+        <p:spPr>
+          <a:xfrm>
+            <a:off x="288000" y="691200"/>
+            <a:ext cx="1872000" cy="216000"/>
+          </a:xfrm>
+          <a:prstGeom prst="rect">
+            <a:avLst/>
+          </a:prstGeom>
+          <a:noFill/>
+        </p:spPr>
+        <p:txBody>
+          <a:bodyPr wrap="square" lIns="0" rIns="0" tIns="0" bIns="0" anchor="t">
+            <a:spAutoFit/>
+          </a:bodyPr>
+          <a:lstStyle/>
+          <a:p>
+            <a:pPr algn="l">
+              <a:lnSpc>
+                <a:spcPts val="1377"/>
+              </a:lnSpc>
+            </a:pPr>
+            <a:r>
+              <a:rPr sz="950" b="1">
+                <a:solidFill>
+                  <a:srgbClr val="FFFFFF"/>
+                </a:solidFill>
+                <a:latin typeface="맑은 고딕"/>
+                <a:ea typeface="맑은 고딕"/>
+              </a:rPr>
+              <a:t>영어</a:t>
+            </a:r>
+          </a:p>
+        </p:txBody>
+      </p:sp>
+      <p:cxnSp>
+        <p:nvCxnSpPr>
+          <p:cNvPr id="8" name="Connector 7"/>
+          <p:cNvCxnSpPr/>
+          <p:nvPr/>
+        </p:nvCxnSpPr>
+        <p:spPr>
+          <a:xfrm>
+            <a:off x="288000" y="892800"/>
+            <a:ext cx="1728000" cy="0"/>
+          </a:xfrm>
+          <a:prstGeom prst="line">
+            <a:avLst/>
+          </a:prstGeom>
+          <a:ln w="3600">
+            <a:solidFill>
+              <a:srgbClr val="FFFFFF"/>
+            </a:solidFill>
+          </a:ln>
+        </p:spPr>
+      </p:cxnSp>
+      <p:sp>
+        <p:nvSpPr>
+          <p:cNvPr id="9" name="텍스트"/>
+          <p:cNvSpPr txBox="1"/>
+          <p:nvPr/>
+        </p:nvSpPr>
+        <p:spPr>
+          <a:xfrm>
+            <a:off x="288000" y="914400"/>
+            <a:ext cx="1872000" cy="216000"/>
+          </a:xfrm>
+          <a:prstGeom prst="rect">
+            <a:avLst/>
+          </a:prstGeom>
+          <a:noFill/>
+        </p:spPr>
+        <p:txBody>
+          <a:bodyPr wrap="square" lIns="0" rIns="0" tIns="0" bIns="0" anchor="t">
+            <a:spAutoFit/>
+          </a:bodyPr>
+          <a:lstStyle/>
+          <a:p>
+            <a:pPr algn="l">
+              <a:lnSpc>
+                <a:spcPts val="1377"/>
+              </a:lnSpc>
+            </a:pPr>
+            <a:r>
+              <a:rPr sz="950" b="1">
+                <a:solidFill>
+                  <a:srgbClr val="FFFFFF"/>
+                </a:solidFill>
+                <a:latin typeface="맑은 고딕"/>
+                <a:ea typeface="맑은 고딕"/>
+              </a:rPr>
+              <a:t>코딩</a:t>
+            </a:r>
+          </a:p>
+        </p:txBody>
+      </p:sp>
+      <p:cxnSp>
+        <p:nvCxnSpPr>
+          <p:cNvPr id="10" name="Connector 9"/>
+          <p:cNvCxnSpPr/>
+          <p:nvPr/>
+        </p:nvCxnSpPr>
+        <p:spPr>
+          <a:xfrm>
+            <a:off x="288000" y="1116000"/>
+            <a:ext cx="1728000" cy="0"/>
+          </a:xfrm>
+          <a:prstGeom prst="line">
+            <a:avLst/>
+          </a:prstGeom>
+          <a:ln w="3600">
+            <a:solidFill>
+              <a:srgbClr val="FFFFFF"/>
+            </a:solidFill>
+          </a:ln>
+        </p:spPr>
+      </p:cxnSp>
+      <p:sp>
+        <p:nvSpPr>
+          <p:cNvPr id="11" name="텍스트"/>
+          <p:cNvSpPr txBox="1"/>
+          <p:nvPr/>
+        </p:nvSpPr>
+        <p:spPr>
+          <a:xfrm>
+            <a:off x="288000" y="1137600"/>
+            <a:ext cx="1872000" cy="216000"/>
+          </a:xfrm>
+          <a:prstGeom prst="rect">
+            <a:avLst/>
+          </a:prstGeom>
+          <a:noFill/>
+        </p:spPr>
+        <p:txBody>
+          <a:bodyPr wrap="square" lIns="0" rIns="0" tIns="0" bIns="0" anchor="t">
+            <a:spAutoFit/>
+          </a:bodyPr>
+          <a:lstStyle/>
+          <a:p>
+            <a:pPr algn="l">
+              <a:lnSpc>
+                <a:spcPts val="1377"/>
+              </a:lnSpc>
+            </a:pPr>
+            <a:r>
+              <a:rPr sz="950" b="1">
+                <a:solidFill>
+                  <a:srgbClr val="FFFFFF"/>
+                </a:solidFill>
+                <a:latin typeface="맑은 고딕"/>
+                <a:ea typeface="맑은 고딕"/>
+              </a:rPr>
+              <a:t>진로 상담</a:t>
+            </a:r>
+          </a:p>
+        </p:txBody>
+      </p:sp>
+      <p:cxnSp>
+        <p:nvCxnSpPr>
+          <p:cNvPr id="12" name="Connector 11"/>
+          <p:cNvCxnSpPr/>
+          <p:nvPr/>
+        </p:nvCxnSpPr>
+        <p:spPr>
+          <a:xfrm>
+            <a:off x="288000" y="1339200"/>
+            <a:ext cx="1728000" cy="0"/>
+          </a:xfrm>
+          <a:prstGeom prst="line">
+            <a:avLst/>
+          </a:prstGeom>
+          <a:ln w="3600">
+            <a:solidFill>
+              <a:srgbClr val="FFFFFF"/>
+            </a:solidFill>
+          </a:ln>
+        </p:spPr>
+      </p:cxnSp>
+      <p:sp>
+        <p:nvSpPr>
+          <p:cNvPr id="13" name="텍스트"/>
+          <p:cNvSpPr txBox="1"/>
+          <p:nvPr/>
+        </p:nvSpPr>
+        <p:spPr>
+          <a:xfrm>
+            <a:off x="2268000" y="468000"/>
+            <a:ext cx="864000" cy="91441"/>
+          </a:xfrm>
+          <a:prstGeom prst="rect">
+            <a:avLst/>
+          </a:prstGeom>
+          <a:noFill/>
+        </p:spPr>
+        <p:txBody>
+          <a:bodyPr wrap="square" lIns="0" rIns="0" tIns="0" bIns="0" anchor="t">
+            <a:spAutoFit/>
+          </a:bodyPr>
+          <a:lstStyle/>
+          <a:p>
+            <a:pPr algn="l">
+              <a:lnSpc>
+                <a:spcPts val="696"/>
+              </a:lnSpc>
+            </a:pPr>
+            <a:r>
+              <a:rPr sz="480" b="1" spc="140">
+                <a:solidFill>
+                  <a:srgbClr val="FFFFFF">
+                    <a:alpha val="75000"/>
+                  </a:srgbClr>
+                </a:solidFill>
+                <a:latin typeface="맑은 고딕"/>
+                <a:ea typeface="맑은 고딕"/>
+              </a:rPr>
+              <a:t>HOURS</a:t>
+            </a:r>
+          </a:p>
+        </p:txBody>
+      </p:sp>
+      <p:sp>
+        <p:nvSpPr>
+          <p:cNvPr id="14" name="텍스트"/>
+          <p:cNvSpPr txBox="1"/>
+          <p:nvPr/>
+        </p:nvSpPr>
+        <p:spPr>
+          <a:xfrm>
+            <a:off x="2268000" y="576000"/>
+            <a:ext cx="864000" cy="118111"/>
+          </a:xfrm>
+          <a:prstGeom prst="rect">
+            <a:avLst/>
+          </a:prstGeom>
+          <a:noFill/>
+        </p:spPr>
+        <p:txBody>
+          <a:bodyPr wrap="square" lIns="0" rIns="0" tIns="0" bIns="0" anchor="t">
+            <a:spAutoFit/>
+          </a:bodyPr>
+          <a:lstStyle/>
+          <a:p>
+            <a:pPr algn="l">
+              <a:lnSpc>
+                <a:spcPts val="899"/>
+              </a:lnSpc>
+            </a:pPr>
+            <a:r>
+              <a:rPr sz="620" b="1">
+                <a:solidFill>
+                  <a:srgbClr val="FFFFFF"/>
+                </a:solidFill>
+                <a:latin typeface="맑은 고딕"/>
+                <a:ea typeface="맑은 고딕"/>
+              </a:rPr>
+              <a:t>평일 13:00 – 21:00</a:t>
+            </a:r>
+          </a:p>
+        </p:txBody>
+      </p:sp>
+      <p:sp>
+        <p:nvSpPr>
+          <p:cNvPr id="15" name="텍스트"/>
+          <p:cNvSpPr txBox="1"/>
+          <p:nvPr/>
+        </p:nvSpPr>
+        <p:spPr>
+          <a:xfrm>
+            <a:off x="2268000" y="900000"/>
+            <a:ext cx="864000" cy="91441"/>
+          </a:xfrm>
+          <a:prstGeom prst="rect">
+            <a:avLst/>
+          </a:prstGeom>
+          <a:noFill/>
+        </p:spPr>
+        <p:txBody>
+          <a:bodyPr wrap="square" lIns="0" rIns="0" tIns="0" bIns="0" anchor="t">
+            <a:spAutoFit/>
+          </a:bodyPr>
+          <a:lstStyle/>
+          <a:p>
+            <a:pPr algn="l">
+              <a:lnSpc>
+                <a:spcPts val="696"/>
+              </a:lnSpc>
+            </a:pPr>
+            <a:r>
+              <a:rPr sz="480" b="1" spc="140">
+                <a:solidFill>
+                  <a:srgbClr val="FFFFFF">
+                    <a:alpha val="75000"/>
+                  </a:srgbClr>
+                </a:solidFill>
+                <a:latin typeface="맑은 고딕"/>
+                <a:ea typeface="맑은 고딕"/>
+              </a:rPr>
+              <a:t>KAKAO</a:t>
+            </a:r>
+          </a:p>
+        </p:txBody>
+      </p:sp>
+      <p:sp>
+        <p:nvSpPr>
+          <p:cNvPr id="16" name="텍스트"/>
+          <p:cNvSpPr txBox="1"/>
+          <p:nvPr/>
+        </p:nvSpPr>
+        <p:spPr>
+          <a:xfrm>
+            <a:off x="2268000" y="1008000"/>
+            <a:ext cx="864000" cy="118111"/>
+          </a:xfrm>
+          <a:prstGeom prst="rect">
+            <a:avLst/>
+          </a:prstGeom>
+          <a:noFill/>
+        </p:spPr>
+        <p:txBody>
+          <a:bodyPr wrap="square" lIns="0" rIns="0" tIns="0" bIns="0" anchor="t">
+            <a:spAutoFit/>
+          </a:bodyPr>
+          <a:lstStyle/>
+          <a:p>
+            <a:pPr algn="l">
+              <a:lnSpc>
+                <a:spcPts val="899"/>
+              </a:lnSpc>
+            </a:pPr>
+            <a:r>
+              <a:rPr sz="620" b="1">
+                <a:solidFill>
+                  <a:srgbClr val="FFFFFF"/>
+                </a:solidFill>
+                <a:latin typeface="맑은 고딕"/>
+                <a:ea typeface="맑은 고딕"/>
+              </a:rPr>
+              <a:t>@채널아이디</a:t>
+            </a:r>
+          </a:p>
+        </p:txBody>
+      </p:sp>
+      <p:sp>
+        <p:nvSpPr>
+          <p:cNvPr id="17" name="텍스트"/>
+          <p:cNvSpPr txBox="1"/>
+          <p:nvPr/>
+        </p:nvSpPr>
+        <p:spPr>
+          <a:xfrm>
+            <a:off x="288000" y="1512000"/>
+            <a:ext cx="1800000" cy="123826"/>
+          </a:xfrm>
+          <a:prstGeom prst="rect">
+            <a:avLst/>
+          </a:prstGeom>
+          <a:noFill/>
+        </p:spPr>
+        <p:txBody>
+          <a:bodyPr wrap="square" lIns="0" rIns="0" tIns="0" bIns="0" anchor="t">
+            <a:spAutoFit/>
+          </a:bodyPr>
+          <a:lstStyle/>
+          <a:p>
+            <a:pPr algn="l">
               <a:lnSpc>
                 <a:spcPts val="942"/>
               </a:lnSpc>
             </a:pPr>
             <a:r>
-              <a:rPr sz="650" b="1" spc="200">
+              <a:rPr sz="650" b="1" spc="220">
                 <a:solidFill>
-                  <a:srgbClr val="A3A9B5"/>
+                  <a:srgbClr val="FFFFFF"/>
                 </a:solidFill>
                 <a:latin typeface="맑은 고딕"/>
                 <a:ea typeface="맑은 고딕"/>
